--- a/Projects/End-Project/PresentationTemplate-VineetSrivastava.pptx
+++ b/Projects/End-Project/PresentationTemplate-VineetSrivastava.pptx
@@ -5,20 +5,21 @@
     <p:sldMasterId id="2147483648" r:id="rId1"/>
   </p:sldMasterIdLst>
   <p:notesMasterIdLst>
-    <p:notesMasterId r:id="rId10"/>
+    <p:notesMasterId r:id="rId11"/>
   </p:notesMasterIdLst>
   <p:handoutMasterIdLst>
-    <p:handoutMasterId r:id="rId11"/>
+    <p:handoutMasterId r:id="rId12"/>
   </p:handoutMasterIdLst>
   <p:sldIdLst>
     <p:sldId id="287" r:id="rId2"/>
-    <p:sldId id="317" r:id="rId3"/>
-    <p:sldId id="322" r:id="rId4"/>
+    <p:sldId id="322" r:id="rId3"/>
+    <p:sldId id="317" r:id="rId4"/>
     <p:sldId id="316" r:id="rId5"/>
     <p:sldId id="318" r:id="rId6"/>
-    <p:sldId id="319" r:id="rId7"/>
-    <p:sldId id="320" r:id="rId8"/>
-    <p:sldId id="321" r:id="rId9"/>
+    <p:sldId id="323" r:id="rId7"/>
+    <p:sldId id="319" r:id="rId8"/>
+    <p:sldId id="320" r:id="rId9"/>
+    <p:sldId id="321" r:id="rId10"/>
   </p:sldIdLst>
   <p:sldSz cx="12192000" cy="6858000"/>
   <p:notesSz cx="7010400" cy="9296400"/>
@@ -270,7 +271,7 @@
           <a:p>
             <a:fld id="{7EDE0417-F54B-42B9-B6DD-E7EE48A4B191}" type="datetimeFigureOut">
               <a:rPr lang="en-IN" smtClean="0"/>
-              <a:t>17-02-2026</a:t>
+              <a:t>18-02-2026</a:t>
             </a:fld>
             <a:endParaRPr lang="en-IN"/>
           </a:p>
@@ -436,7 +437,7 @@
           <a:p>
             <a:fld id="{68E55364-5615-482A-B28A-5F5A5326E070}" type="datetimeFigureOut">
               <a:rPr lang="en-IN" smtClean="0"/>
-              <a:t>17-02-2026</a:t>
+              <a:t>18-02-2026</a:t>
             </a:fld>
             <a:endParaRPr lang="en-IN"/>
           </a:p>
@@ -2213,304 +2214,6 @@
   <p:cSld>
     <p:spTree>
       <p:nvGrpSpPr>
-        <p:cNvPr id="1" name=""/>
-        <p:cNvGrpSpPr/>
-        <p:nvPr/>
-      </p:nvGrpSpPr>
-      <p:grpSpPr>
-        <a:xfrm>
-          <a:off x="0" y="0"/>
-          <a:ext cx="0" cy="0"/>
-          <a:chOff x="0" y="0"/>
-          <a:chExt cx="0" cy="0"/>
-        </a:xfrm>
-      </p:grpSpPr>
-      <p:sp>
-        <p:nvSpPr>
-          <p:cNvPr id="2" name="Content Placeholder 1">
-            <a:extLst>
-              <a:ext uri="{FF2B5EF4-FFF2-40B4-BE49-F238E27FC236}">
-                <a16:creationId xmlns:a16="http://schemas.microsoft.com/office/drawing/2014/main" id="{0B1AD815-5C8E-0B54-E14C-AAF03EAA6C7F}"/>
-              </a:ext>
-            </a:extLst>
-          </p:cNvPr>
-          <p:cNvSpPr>
-            <a:spLocks noGrp="1"/>
-          </p:cNvSpPr>
-          <p:nvPr>
-            <p:ph idx="1"/>
-          </p:nvPr>
-        </p:nvSpPr>
-        <p:spPr/>
-        <p:txBody>
-          <a:bodyPr>
-            <a:normAutofit/>
-          </a:bodyPr>
-          <a:lstStyle/>
-          <a:p>
-            <a:r>
-              <a:rPr lang="en-US" dirty="0"/>
-              <a:t>Code-Switching</a:t>
-            </a:r>
-          </a:p>
-          <a:p>
-            <a:pPr marL="0" indent="0">
-              <a:buNone/>
-            </a:pPr>
-            <a:r>
-              <a:rPr lang="en-US" dirty="0"/>
-              <a:t>   </a:t>
-            </a:r>
-            <a:r>
-              <a:rPr lang="en-US" sz="2000" dirty="0"/>
-              <a:t>Practice of alternating between two or more languages or language varieties in a single discourse </a:t>
-            </a:r>
-          </a:p>
-          <a:p>
-            <a:pPr marL="0" indent="0">
-              <a:buNone/>
-            </a:pPr>
-            <a:r>
-              <a:rPr lang="en-US" sz="2000" dirty="0"/>
-              <a:t>    Example: “kal meeting schedule </a:t>
-            </a:r>
-            <a:r>
-              <a:rPr lang="en-US" sz="2000" dirty="0" err="1"/>
-              <a:t>kar</a:t>
-            </a:r>
-            <a:r>
-              <a:rPr lang="en-US" sz="2000" dirty="0"/>
-              <a:t> </a:t>
-            </a:r>
-            <a:r>
-              <a:rPr lang="en-US" sz="2000" dirty="0" err="1"/>
-              <a:t>dena</a:t>
-            </a:r>
-            <a:r>
-              <a:rPr lang="en-US" sz="2000" dirty="0"/>
-              <a:t>”</a:t>
-            </a:r>
-          </a:p>
-          <a:p>
-            <a:pPr marL="457200" lvl="1" indent="0">
-              <a:buNone/>
-            </a:pPr>
-            <a:r>
-              <a:rPr lang="en-US" sz="1400" dirty="0"/>
-              <a:t>   kal – Hindi </a:t>
-            </a:r>
-          </a:p>
-          <a:p>
-            <a:pPr marL="457200" lvl="1" indent="0">
-              <a:buNone/>
-            </a:pPr>
-            <a:r>
-              <a:rPr lang="en-US" sz="1400" dirty="0"/>
-              <a:t>   meeting – English </a:t>
-            </a:r>
-          </a:p>
-          <a:p>
-            <a:pPr marL="457200" lvl="1" indent="0">
-              <a:buNone/>
-            </a:pPr>
-            <a:r>
-              <a:rPr lang="en-US" sz="1400" dirty="0"/>
-              <a:t>   schedule – English </a:t>
-            </a:r>
-          </a:p>
-          <a:p>
-            <a:pPr marL="457200" lvl="1" indent="0">
-              <a:buNone/>
-            </a:pPr>
-            <a:r>
-              <a:rPr lang="en-US" sz="1400" dirty="0"/>
-              <a:t>   </a:t>
-            </a:r>
-            <a:r>
-              <a:rPr lang="en-US" sz="1400" dirty="0" err="1"/>
-              <a:t>kar</a:t>
-            </a:r>
-            <a:r>
-              <a:rPr lang="en-US" sz="1400" dirty="0"/>
-              <a:t> – Hindi </a:t>
-            </a:r>
-          </a:p>
-          <a:p>
-            <a:pPr marL="457200" lvl="1" indent="0">
-              <a:buNone/>
-            </a:pPr>
-            <a:r>
-              <a:rPr lang="en-US" sz="1400" dirty="0"/>
-              <a:t>   </a:t>
-            </a:r>
-            <a:r>
-              <a:rPr lang="en-US" sz="1400" dirty="0" err="1"/>
-              <a:t>dena</a:t>
-            </a:r>
-            <a:r>
-              <a:rPr lang="en-US" sz="1400" dirty="0"/>
-              <a:t> – Hindi</a:t>
-            </a:r>
-          </a:p>
-          <a:p>
-            <a:pPr marL="457200" lvl="1" indent="0">
-              <a:buNone/>
-            </a:pPr>
-            <a:r>
-              <a:rPr lang="en-US" sz="1400" dirty="0"/>
-              <a:t>   switching within a sentence </a:t>
-            </a:r>
-          </a:p>
-          <a:p>
-            <a:pPr marL="0" indent="0">
-              <a:buNone/>
-            </a:pPr>
-            <a:r>
-              <a:rPr lang="en-US" dirty="0"/>
-              <a:t>       </a:t>
-            </a:r>
-          </a:p>
-          <a:p>
-            <a:r>
-              <a:rPr lang="en-US" dirty="0"/>
-              <a:t>Why code switching is hard for ASR </a:t>
-            </a:r>
-          </a:p>
-          <a:p>
-            <a:pPr lvl="1">
-              <a:buFont typeface="Wingdings" panose="05000000000000000000" pitchFamily="2" charset="2"/>
-              <a:buChar char="Ø"/>
-            </a:pPr>
-            <a:r>
-              <a:rPr lang="en-US" sz="1800" dirty="0"/>
-              <a:t>Traditional ASR assumes one language, one language model and one phoneme inventory.</a:t>
-            </a:r>
-          </a:p>
-          <a:p>
-            <a:pPr lvl="1">
-              <a:buFont typeface="Wingdings" panose="05000000000000000000" pitchFamily="2" charset="2"/>
-              <a:buChar char="Ø"/>
-            </a:pPr>
-            <a:r>
-              <a:rPr lang="en-US" sz="1800" dirty="0"/>
-              <a:t>But Hinglish as Hindi grammar as well as English words, Indian accented English, Mixed phonetics and variable pronunciation. </a:t>
-            </a:r>
-          </a:p>
-          <a:p>
-            <a:pPr lvl="1">
-              <a:buFont typeface="Wingdings" panose="05000000000000000000" pitchFamily="2" charset="2"/>
-              <a:buChar char="Ø"/>
-            </a:pPr>
-            <a:r>
-              <a:rPr lang="en-US" sz="1800" dirty="0"/>
-              <a:t>Causes confusion in language modelling.</a:t>
-            </a:r>
-          </a:p>
-          <a:p>
-            <a:pPr marL="457200" lvl="1" indent="0">
-              <a:buNone/>
-            </a:pPr>
-            <a:endParaRPr lang="en-US" sz="1800" dirty="0"/>
-          </a:p>
-          <a:p>
-            <a:pPr marL="457200" lvl="1" indent="0">
-              <a:buNone/>
-            </a:pPr>
-            <a:endParaRPr lang="en-US" sz="1800" dirty="0"/>
-          </a:p>
-          <a:p>
-            <a:pPr lvl="1">
-              <a:buFont typeface="Wingdings" panose="05000000000000000000" pitchFamily="2" charset="2"/>
-              <a:buChar char="Ø"/>
-            </a:pPr>
-            <a:endParaRPr lang="en-US" sz="1800" dirty="0"/>
-          </a:p>
-          <a:p>
-            <a:pPr marL="0" indent="0">
-              <a:buNone/>
-            </a:pPr>
-            <a:endParaRPr lang="en-US" dirty="0"/>
-          </a:p>
-        </p:txBody>
-      </p:sp>
-      <p:sp>
-        <p:nvSpPr>
-          <p:cNvPr id="3" name="Title 2">
-            <a:extLst>
-              <a:ext uri="{FF2B5EF4-FFF2-40B4-BE49-F238E27FC236}">
-                <a16:creationId xmlns:a16="http://schemas.microsoft.com/office/drawing/2014/main" id="{A18FA631-E5DE-38FB-3631-5247D3FA94E0}"/>
-              </a:ext>
-            </a:extLst>
-          </p:cNvPr>
-          <p:cNvSpPr>
-            <a:spLocks noGrp="1"/>
-          </p:cNvSpPr>
-          <p:nvPr>
-            <p:ph type="title"/>
-          </p:nvPr>
-        </p:nvSpPr>
-        <p:spPr/>
-        <p:txBody>
-          <a:bodyPr>
-            <a:normAutofit fontScale="90000"/>
-          </a:bodyPr>
-          <a:lstStyle/>
-          <a:p>
-            <a:r>
-              <a:rPr lang="en-US" dirty="0"/>
-              <a:t>Background</a:t>
-            </a:r>
-          </a:p>
-        </p:txBody>
-      </p:sp>
-      <p:sp>
-        <p:nvSpPr>
-          <p:cNvPr id="4" name="Slide Number Placeholder 3">
-            <a:extLst>
-              <a:ext uri="{FF2B5EF4-FFF2-40B4-BE49-F238E27FC236}">
-                <a16:creationId xmlns:a16="http://schemas.microsoft.com/office/drawing/2014/main" id="{DEB8CAAE-9044-8FCD-0B55-1811F15639CF}"/>
-              </a:ext>
-            </a:extLst>
-          </p:cNvPr>
-          <p:cNvSpPr>
-            <a:spLocks noGrp="1"/>
-          </p:cNvSpPr>
-          <p:nvPr>
-            <p:ph type="sldNum" sz="quarter" idx="12"/>
-          </p:nvPr>
-        </p:nvSpPr>
-        <p:spPr/>
-        <p:txBody>
-          <a:bodyPr/>
-          <a:lstStyle/>
-          <a:p>
-            <a:fld id="{742B7CED-DC51-4976-975C-28F89E3EDFC9}" type="slidenum">
-              <a:rPr lang="en-GB" smtClean="0"/>
-              <a:pPr/>
-              <a:t>2</a:t>
-            </a:fld>
-            <a:endParaRPr lang="en-GB" dirty="0"/>
-          </a:p>
-        </p:txBody>
-      </p:sp>
-    </p:spTree>
-    <p:extLst>
-      <p:ext uri="{BB962C8B-B14F-4D97-AF65-F5344CB8AC3E}">
-        <p14:creationId xmlns:p14="http://schemas.microsoft.com/office/powerpoint/2010/main" val="529271744"/>
-      </p:ext>
-    </p:extLst>
-  </p:cSld>
-  <p:clrMapOvr>
-    <a:masterClrMapping/>
-  </p:clrMapOvr>
-</p:sld>
-</file>
-
-<file path=ppt/slides/slide3.xml><?xml version="1.0" encoding="utf-8"?>
-<p:sld xmlns:a="http://schemas.openxmlformats.org/drawingml/2006/main" xmlns:r="http://schemas.openxmlformats.org/officeDocument/2006/relationships" xmlns:p="http://schemas.openxmlformats.org/presentationml/2006/main">
-  <p:cSld>
-    <p:spTree>
-      <p:nvGrpSpPr>
         <p:cNvPr id="1" name="">
           <a:extLst>
             <a:ext uri="{FF2B5EF4-FFF2-40B4-BE49-F238E27FC236}">
@@ -2545,40 +2248,84 @@
             <p:ph idx="1"/>
           </p:nvPr>
         </p:nvSpPr>
-        <p:spPr/>
+        <p:spPr>
+          <a:xfrm>
+            <a:off x="90557" y="1105627"/>
+            <a:ext cx="11859027" cy="5156627"/>
+          </a:xfrm>
+        </p:spPr>
         <p:txBody>
           <a:bodyPr>
-            <a:normAutofit/>
+            <a:normAutofit lnSpcReduction="10000"/>
           </a:bodyPr>
           <a:lstStyle/>
           <a:p>
             <a:r>
               <a:rPr lang="en-US" dirty="0"/>
-              <a:t>Existing ASR systems are trained on monolingual corpora.</a:t>
+              <a:t>ASR</a:t>
+            </a:r>
+            <a:r>
+              <a:rPr lang="en-US" dirty="0">
+                <a:solidFill>
+                  <a:schemeClr val="accent1">
+                    <a:lumMod val="50000"/>
+                  </a:schemeClr>
+                </a:solidFill>
+              </a:rPr>
+              <a:t> has evolved from probabilistic models (Hidden Markov Model, Gaussian Mixture Model) to deep-learning architectures including RNN-T and transformer sequence-to-sequence model like whisper.</a:t>
             </a:r>
           </a:p>
           <a:p>
             <a:pPr marL="0" indent="0">
               <a:buNone/>
             </a:pPr>
-            <a:endParaRPr lang="en-US" dirty="0"/>
-          </a:p>
-          <a:p>
+            <a:endParaRPr lang="en-US" dirty="0">
+              <a:solidFill>
+                <a:schemeClr val="accent1">
+                  <a:lumMod val="50000"/>
+                </a:schemeClr>
+              </a:solidFill>
+            </a:endParaRPr>
+          </a:p>
+          <a:p>
+            <a:r>
+              <a:rPr lang="en-US" dirty="0">
+                <a:solidFill>
+                  <a:schemeClr val="accent1">
+                    <a:lumMod val="50000"/>
+                  </a:schemeClr>
+                </a:solidFill>
+              </a:rPr>
+              <a:t>Field underwent a paradigm shift with </a:t>
+            </a:r>
             <a:r>
               <a:rPr lang="en-US" dirty="0"/>
-              <a:t>ASR has evolved from probabilistic models (Hidden Markov Model, Gaussian Mixture Model) to deep-learning architectures including RNN-T and transformer sequence-to-sequence model like whisper.</a:t>
+              <a:t>Whisper</a:t>
+            </a:r>
+            <a:r>
+              <a:rPr lang="en-US" dirty="0">
+                <a:solidFill>
+                  <a:schemeClr val="accent1">
+                    <a:lumMod val="50000"/>
+                  </a:schemeClr>
+                </a:solidFill>
+              </a:rPr>
+              <a:t> ( a transformer sequence-to-sequence model) </a:t>
             </a:r>
           </a:p>
           <a:p>
             <a:pPr marL="0" indent="0">
               <a:buNone/>
             </a:pPr>
-            <a:endParaRPr lang="en-US" dirty="0"/>
-          </a:p>
-          <a:p>
-            <a:r>
-              <a:rPr lang="en-US" dirty="0"/>
-              <a:t>Whisper features:</a:t>
+            <a:r>
+              <a:rPr lang="en-US" dirty="0">
+                <a:solidFill>
+                  <a:schemeClr val="accent1">
+                    <a:lumMod val="50000"/>
+                  </a:schemeClr>
+                </a:solidFill>
+              </a:rPr>
+              <a:t>   Its features:</a:t>
             </a:r>
           </a:p>
           <a:p>
@@ -2587,7 +2334,13 @@
               <a:buChar char="Ø"/>
             </a:pPr>
             <a:r>
-              <a:rPr lang="en-US" dirty="0"/>
+              <a:rPr lang="en-US" dirty="0">
+                <a:solidFill>
+                  <a:schemeClr val="accent1">
+                    <a:lumMod val="50000"/>
+                  </a:schemeClr>
+                </a:solidFill>
+              </a:rPr>
               <a:t>	Multilingual support</a:t>
             </a:r>
           </a:p>
@@ -2597,7 +2350,13 @@
               <a:buChar char="Ø"/>
             </a:pPr>
             <a:r>
-              <a:rPr lang="en-US" dirty="0"/>
+              <a:rPr lang="en-US" dirty="0">
+                <a:solidFill>
+                  <a:schemeClr val="accent1">
+                    <a:lumMod val="50000"/>
+                  </a:schemeClr>
+                </a:solidFill>
+              </a:rPr>
               <a:t>	Adaptability to suit specific use-cases</a:t>
             </a:r>
           </a:p>
@@ -2607,8 +2366,57 @@
               <a:buChar char="Ø"/>
             </a:pPr>
             <a:r>
-              <a:rPr lang="en-US" dirty="0"/>
+              <a:rPr lang="en-US" dirty="0">
+                <a:solidFill>
+                  <a:schemeClr val="accent1">
+                    <a:lumMod val="50000"/>
+                  </a:schemeClr>
+                </a:solidFill>
+              </a:rPr>
               <a:t>	High accuracy and robustness to noise </a:t>
+            </a:r>
+          </a:p>
+          <a:p>
+            <a:pPr marL="457200" lvl="1" indent="0">
+              <a:buNone/>
+            </a:pPr>
+            <a:endParaRPr lang="en-US" sz="1800" dirty="0">
+              <a:solidFill>
+                <a:schemeClr val="accent1">
+                  <a:lumMod val="50000"/>
+                </a:schemeClr>
+              </a:solidFill>
+            </a:endParaRPr>
+          </a:p>
+          <a:p>
+            <a:pPr marL="228600" lvl="1">
+              <a:spcBef>
+                <a:spcPts val="1000"/>
+              </a:spcBef>
+            </a:pPr>
+            <a:r>
+              <a:rPr lang="en-US" sz="2800" dirty="0">
+                <a:solidFill>
+                  <a:schemeClr val="accent1">
+                    <a:lumMod val="50000"/>
+                  </a:schemeClr>
+                </a:solidFill>
+              </a:rPr>
+              <a:t>Existing ASR systems are trained on </a:t>
+            </a:r>
+            <a:r>
+              <a:rPr lang="en-US" sz="2800" dirty="0"/>
+              <a:t>monolingual</a:t>
+            </a:r>
+            <a:r>
+              <a:rPr lang="en-US" sz="2800" dirty="0">
+                <a:solidFill>
+                  <a:schemeClr val="accent1">
+                    <a:lumMod val="50000"/>
+                  </a:schemeClr>
+                </a:solidFill>
+              </a:rPr>
+              <a:t> corpora i.e. language specific.</a:t>
             </a:r>
           </a:p>
           <a:p>
@@ -2692,7 +2500,7 @@
             <a:fld id="{742B7CED-DC51-4976-975C-28F89E3EDFC9}" type="slidenum">
               <a:rPr lang="en-GB" smtClean="0"/>
               <a:pPr/>
-              <a:t>3</a:t>
+              <a:t>2</a:t>
             </a:fld>
             <a:endParaRPr lang="en-GB" dirty="0"/>
           </a:p>
@@ -2702,6 +2510,430 @@
     <p:extLst>
       <p:ext uri="{BB962C8B-B14F-4D97-AF65-F5344CB8AC3E}">
         <p14:creationId xmlns:p14="http://schemas.microsoft.com/office/powerpoint/2010/main" val="3308504769"/>
+      </p:ext>
+    </p:extLst>
+  </p:cSld>
+  <p:clrMapOvr>
+    <a:masterClrMapping/>
+  </p:clrMapOvr>
+</p:sld>
+</file>
+
+<file path=ppt/slides/slide3.xml><?xml version="1.0" encoding="utf-8"?>
+<p:sld xmlns:a="http://schemas.openxmlformats.org/drawingml/2006/main" xmlns:r="http://schemas.openxmlformats.org/officeDocument/2006/relationships" xmlns:p="http://schemas.openxmlformats.org/presentationml/2006/main">
+  <p:cSld>
+    <p:spTree>
+      <p:nvGrpSpPr>
+        <p:cNvPr id="1" name=""/>
+        <p:cNvGrpSpPr/>
+        <p:nvPr/>
+      </p:nvGrpSpPr>
+      <p:grpSpPr>
+        <a:xfrm>
+          <a:off x="0" y="0"/>
+          <a:ext cx="0" cy="0"/>
+          <a:chOff x="0" y="0"/>
+          <a:chExt cx="0" cy="0"/>
+        </a:xfrm>
+      </p:grpSpPr>
+      <p:sp>
+        <p:nvSpPr>
+          <p:cNvPr id="2" name="Content Placeholder 1">
+            <a:extLst>
+              <a:ext uri="{FF2B5EF4-FFF2-40B4-BE49-F238E27FC236}">
+                <a16:creationId xmlns:a16="http://schemas.microsoft.com/office/drawing/2014/main" id="{0B1AD815-5C8E-0B54-E14C-AAF03EAA6C7F}"/>
+              </a:ext>
+            </a:extLst>
+          </p:cNvPr>
+          <p:cNvSpPr>
+            <a:spLocks noGrp="1"/>
+          </p:cNvSpPr>
+          <p:nvPr>
+            <p:ph idx="1"/>
+          </p:nvPr>
+        </p:nvSpPr>
+        <p:spPr/>
+        <p:txBody>
+          <a:bodyPr>
+            <a:normAutofit lnSpcReduction="10000"/>
+          </a:bodyPr>
+          <a:lstStyle/>
+          <a:p>
+            <a:r>
+              <a:rPr lang="en-US" dirty="0"/>
+              <a:t>Code-Switching</a:t>
+            </a:r>
+          </a:p>
+          <a:p>
+            <a:pPr marL="0" indent="0">
+              <a:buNone/>
+            </a:pPr>
+            <a:r>
+              <a:rPr lang="en-US" dirty="0">
+                <a:solidFill>
+                  <a:schemeClr val="accent1">
+                    <a:lumMod val="50000"/>
+                  </a:schemeClr>
+                </a:solidFill>
+              </a:rPr>
+              <a:t>   </a:t>
+            </a:r>
+            <a:r>
+              <a:rPr lang="en-US" sz="2000" dirty="0">
+                <a:solidFill>
+                  <a:schemeClr val="accent1">
+                    <a:lumMod val="50000"/>
+                  </a:schemeClr>
+                </a:solidFill>
+              </a:rPr>
+              <a:t>Practice of alternating between two or more languages or language varieties in a single discourse </a:t>
+            </a:r>
+          </a:p>
+          <a:p>
+            <a:pPr marL="0" indent="0">
+              <a:buNone/>
+            </a:pPr>
+            <a:r>
+              <a:rPr lang="en-US" sz="2000" dirty="0">
+                <a:solidFill>
+                  <a:schemeClr val="accent1">
+                    <a:lumMod val="50000"/>
+                  </a:schemeClr>
+                </a:solidFill>
+              </a:rPr>
+              <a:t>    Example: “kal meeting schedule </a:t>
+            </a:r>
+            <a:r>
+              <a:rPr lang="en-US" sz="2000" dirty="0" err="1">
+                <a:solidFill>
+                  <a:schemeClr val="accent1">
+                    <a:lumMod val="50000"/>
+                  </a:schemeClr>
+                </a:solidFill>
+              </a:rPr>
+              <a:t>kar</a:t>
+            </a:r>
+            <a:r>
+              <a:rPr lang="en-US" sz="2000" dirty="0">
+                <a:solidFill>
+                  <a:schemeClr val="accent1">
+                    <a:lumMod val="50000"/>
+                  </a:schemeClr>
+                </a:solidFill>
+              </a:rPr>
+              <a:t> </a:t>
+            </a:r>
+            <a:r>
+              <a:rPr lang="en-US" sz="2000" dirty="0" err="1">
+                <a:solidFill>
+                  <a:schemeClr val="accent1">
+                    <a:lumMod val="50000"/>
+                  </a:schemeClr>
+                </a:solidFill>
+              </a:rPr>
+              <a:t>dena</a:t>
+            </a:r>
+            <a:r>
+              <a:rPr lang="en-US" sz="2000" dirty="0">
+                <a:solidFill>
+                  <a:schemeClr val="accent1">
+                    <a:lumMod val="50000"/>
+                  </a:schemeClr>
+                </a:solidFill>
+              </a:rPr>
+              <a:t>”</a:t>
+            </a:r>
+          </a:p>
+          <a:p>
+            <a:pPr marL="457200" lvl="1" indent="0">
+              <a:buNone/>
+            </a:pPr>
+            <a:r>
+              <a:rPr lang="en-US" sz="1600" dirty="0">
+                <a:solidFill>
+                  <a:schemeClr val="accent1">
+                    <a:lumMod val="50000"/>
+                  </a:schemeClr>
+                </a:solidFill>
+              </a:rPr>
+              <a:t>   kal – Hindi </a:t>
+            </a:r>
+          </a:p>
+          <a:p>
+            <a:pPr marL="457200" lvl="1" indent="0">
+              <a:buNone/>
+            </a:pPr>
+            <a:r>
+              <a:rPr lang="en-US" sz="1600" dirty="0">
+                <a:solidFill>
+                  <a:schemeClr val="accent1">
+                    <a:lumMod val="50000"/>
+                  </a:schemeClr>
+                </a:solidFill>
+              </a:rPr>
+              <a:t>   meeting – English </a:t>
+            </a:r>
+          </a:p>
+          <a:p>
+            <a:pPr marL="457200" lvl="1" indent="0">
+              <a:buNone/>
+            </a:pPr>
+            <a:r>
+              <a:rPr lang="en-US" sz="1600" dirty="0">
+                <a:solidFill>
+                  <a:schemeClr val="accent1">
+                    <a:lumMod val="50000"/>
+                  </a:schemeClr>
+                </a:solidFill>
+              </a:rPr>
+              <a:t>   schedule – English </a:t>
+            </a:r>
+          </a:p>
+          <a:p>
+            <a:pPr marL="457200" lvl="1" indent="0">
+              <a:buNone/>
+            </a:pPr>
+            <a:r>
+              <a:rPr lang="en-US" sz="1600" dirty="0">
+                <a:solidFill>
+                  <a:schemeClr val="accent1">
+                    <a:lumMod val="50000"/>
+                  </a:schemeClr>
+                </a:solidFill>
+              </a:rPr>
+              <a:t>   </a:t>
+            </a:r>
+            <a:r>
+              <a:rPr lang="en-US" sz="1600" dirty="0" err="1">
+                <a:solidFill>
+                  <a:schemeClr val="accent1">
+                    <a:lumMod val="50000"/>
+                  </a:schemeClr>
+                </a:solidFill>
+              </a:rPr>
+              <a:t>kar</a:t>
+            </a:r>
+            <a:r>
+              <a:rPr lang="en-US" sz="1600" dirty="0">
+                <a:solidFill>
+                  <a:schemeClr val="accent1">
+                    <a:lumMod val="50000"/>
+                  </a:schemeClr>
+                </a:solidFill>
+              </a:rPr>
+              <a:t> – Hindi </a:t>
+            </a:r>
+          </a:p>
+          <a:p>
+            <a:pPr marL="457200" lvl="1" indent="0">
+              <a:buNone/>
+            </a:pPr>
+            <a:r>
+              <a:rPr lang="en-US" sz="1600" dirty="0">
+                <a:solidFill>
+                  <a:schemeClr val="accent1">
+                    <a:lumMod val="50000"/>
+                  </a:schemeClr>
+                </a:solidFill>
+              </a:rPr>
+              <a:t>   </a:t>
+            </a:r>
+            <a:r>
+              <a:rPr lang="en-US" sz="1600" dirty="0" err="1">
+                <a:solidFill>
+                  <a:schemeClr val="accent1">
+                    <a:lumMod val="50000"/>
+                  </a:schemeClr>
+                </a:solidFill>
+              </a:rPr>
+              <a:t>dena</a:t>
+            </a:r>
+            <a:r>
+              <a:rPr lang="en-US" sz="1600" dirty="0">
+                <a:solidFill>
+                  <a:schemeClr val="accent1">
+                    <a:lumMod val="50000"/>
+                  </a:schemeClr>
+                </a:solidFill>
+              </a:rPr>
+              <a:t> – Hindi</a:t>
+            </a:r>
+          </a:p>
+          <a:p>
+            <a:pPr marL="457200" lvl="1" indent="0">
+              <a:buNone/>
+            </a:pPr>
+            <a:r>
+              <a:rPr lang="en-US" sz="1600" dirty="0">
+                <a:solidFill>
+                  <a:schemeClr val="accent1">
+                    <a:lumMod val="50000"/>
+                  </a:schemeClr>
+                </a:solidFill>
+              </a:rPr>
+              <a:t>   switching within a sentence </a:t>
+            </a:r>
+          </a:p>
+          <a:p>
+            <a:pPr marL="0" indent="0">
+              <a:buNone/>
+            </a:pPr>
+            <a:r>
+              <a:rPr lang="en-US" dirty="0">
+                <a:solidFill>
+                  <a:schemeClr val="accent1">
+                    <a:lumMod val="50000"/>
+                  </a:schemeClr>
+                </a:solidFill>
+              </a:rPr>
+              <a:t>       </a:t>
+            </a:r>
+          </a:p>
+          <a:p>
+            <a:r>
+              <a:rPr lang="en-US" dirty="0"/>
+              <a:t>Why code switching is hard for ASR </a:t>
+            </a:r>
+          </a:p>
+          <a:p>
+            <a:pPr lvl="1">
+              <a:buFont typeface="Wingdings" panose="05000000000000000000" pitchFamily="2" charset="2"/>
+              <a:buChar char="Ø"/>
+            </a:pPr>
+            <a:r>
+              <a:rPr lang="en-US" sz="1800" dirty="0">
+                <a:solidFill>
+                  <a:schemeClr val="accent1">
+                    <a:lumMod val="50000"/>
+                  </a:schemeClr>
+                </a:solidFill>
+              </a:rPr>
+              <a:t>Traditional ASR assumes one language, one language model and one phoneme inventory.</a:t>
+            </a:r>
+          </a:p>
+          <a:p>
+            <a:pPr lvl="1">
+              <a:buFont typeface="Wingdings" panose="05000000000000000000" pitchFamily="2" charset="2"/>
+              <a:buChar char="Ø"/>
+            </a:pPr>
+            <a:r>
+              <a:rPr lang="en-US" sz="1800" dirty="0">
+                <a:solidFill>
+                  <a:schemeClr val="accent1">
+                    <a:lumMod val="50000"/>
+                  </a:schemeClr>
+                </a:solidFill>
+              </a:rPr>
+              <a:t>But Hinglish as Hindi grammar as well as English words, Indian accented English, Mixed phonetics and variable pronunciation. </a:t>
+            </a:r>
+          </a:p>
+          <a:p>
+            <a:pPr lvl="1">
+              <a:buFont typeface="Wingdings" panose="05000000000000000000" pitchFamily="2" charset="2"/>
+              <a:buChar char="Ø"/>
+            </a:pPr>
+            <a:r>
+              <a:rPr lang="en-US" sz="1800" dirty="0">
+                <a:solidFill>
+                  <a:schemeClr val="accent1">
+                    <a:lumMod val="50000"/>
+                  </a:schemeClr>
+                </a:solidFill>
+              </a:rPr>
+              <a:t>Causes confusion in language modelling.</a:t>
+            </a:r>
+          </a:p>
+          <a:p>
+            <a:pPr marL="457200" lvl="1" indent="0">
+              <a:buNone/>
+            </a:pPr>
+            <a:endParaRPr lang="en-US" sz="1800" dirty="0"/>
+          </a:p>
+          <a:p>
+            <a:pPr marL="457200" lvl="1" indent="0">
+              <a:buNone/>
+            </a:pPr>
+            <a:endParaRPr lang="en-US" sz="1800" dirty="0"/>
+          </a:p>
+          <a:p>
+            <a:pPr lvl="1">
+              <a:buFont typeface="Wingdings" panose="05000000000000000000" pitchFamily="2" charset="2"/>
+              <a:buChar char="Ø"/>
+            </a:pPr>
+            <a:endParaRPr lang="en-US" sz="1800" dirty="0"/>
+          </a:p>
+          <a:p>
+            <a:pPr marL="0" indent="0">
+              <a:buNone/>
+            </a:pPr>
+            <a:endParaRPr lang="en-US" dirty="0"/>
+          </a:p>
+        </p:txBody>
+      </p:sp>
+      <p:sp>
+        <p:nvSpPr>
+          <p:cNvPr id="3" name="Title 2">
+            <a:extLst>
+              <a:ext uri="{FF2B5EF4-FFF2-40B4-BE49-F238E27FC236}">
+                <a16:creationId xmlns:a16="http://schemas.microsoft.com/office/drawing/2014/main" id="{A18FA631-E5DE-38FB-3631-5247D3FA94E0}"/>
+              </a:ext>
+            </a:extLst>
+          </p:cNvPr>
+          <p:cNvSpPr>
+            <a:spLocks noGrp="1"/>
+          </p:cNvSpPr>
+          <p:nvPr>
+            <p:ph type="title"/>
+          </p:nvPr>
+        </p:nvSpPr>
+        <p:spPr/>
+        <p:txBody>
+          <a:bodyPr>
+            <a:normAutofit fontScale="90000"/>
+          </a:bodyPr>
+          <a:lstStyle/>
+          <a:p>
+            <a:r>
+              <a:rPr lang="en-US" dirty="0"/>
+              <a:t>Background</a:t>
+            </a:r>
+          </a:p>
+        </p:txBody>
+      </p:sp>
+      <p:sp>
+        <p:nvSpPr>
+          <p:cNvPr id="4" name="Slide Number Placeholder 3">
+            <a:extLst>
+              <a:ext uri="{FF2B5EF4-FFF2-40B4-BE49-F238E27FC236}">
+                <a16:creationId xmlns:a16="http://schemas.microsoft.com/office/drawing/2014/main" id="{DEB8CAAE-9044-8FCD-0B55-1811F15639CF}"/>
+              </a:ext>
+            </a:extLst>
+          </p:cNvPr>
+          <p:cNvSpPr>
+            <a:spLocks noGrp="1"/>
+          </p:cNvSpPr>
+          <p:nvPr>
+            <p:ph type="sldNum" sz="quarter" idx="12"/>
+          </p:nvPr>
+        </p:nvSpPr>
+        <p:spPr/>
+        <p:txBody>
+          <a:bodyPr/>
+          <a:lstStyle/>
+          <a:p>
+            <a:fld id="{742B7CED-DC51-4976-975C-28F89E3EDFC9}" type="slidenum">
+              <a:rPr lang="en-GB" smtClean="0"/>
+              <a:pPr/>
+              <a:t>3</a:t>
+            </a:fld>
+            <a:endParaRPr lang="en-GB" dirty="0"/>
+          </a:p>
+        </p:txBody>
+      </p:sp>
+    </p:spTree>
+    <p:extLst>
+      <p:ext uri="{BB962C8B-B14F-4D97-AF65-F5344CB8AC3E}">
+        <p14:creationId xmlns:p14="http://schemas.microsoft.com/office/powerpoint/2010/main" val="529271744"/>
       </p:ext>
     </p:extLst>
   </p:cSld>
@@ -2746,14 +2978,180 @@
         </p:nvSpPr>
         <p:spPr/>
         <p:txBody>
-          <a:bodyPr/>
+          <a:bodyPr>
+            <a:normAutofit lnSpcReduction="10000"/>
+          </a:bodyPr>
           <a:lstStyle/>
           <a:p>
-            <a:pPr>
-              <a:buFont typeface="Arial" panose="020B0604020202020204" pitchFamily="34" charset="0"/>
-              <a:buChar char="•"/>
-            </a:pPr>
-            <a:endParaRPr lang="en-US" dirty="0"/>
+            <a:r>
+              <a:rPr lang="en-US" dirty="0"/>
+              <a:t>To design and empirically evaluate a parameter-efficient fine-tuning ASR framework that</a:t>
+            </a:r>
+          </a:p>
+          <a:p>
+            <a:pPr lvl="1">
+              <a:buFont typeface="Wingdings" panose="05000000000000000000" pitchFamily="2" charset="2"/>
+              <a:buChar char="Ø"/>
+            </a:pPr>
+            <a:r>
+              <a:rPr lang="en-US" sz="2000" dirty="0">
+                <a:solidFill>
+                  <a:schemeClr val="accent1">
+                    <a:lumMod val="50000"/>
+                  </a:schemeClr>
+                </a:solidFill>
+              </a:rPr>
+              <a:t>Reduces Word Error Rate (WER) on Hinglish speech</a:t>
+            </a:r>
+          </a:p>
+          <a:p>
+            <a:pPr marL="457200" lvl="1" indent="0">
+              <a:buNone/>
+            </a:pPr>
+            <a:endParaRPr lang="en-US" sz="2000" dirty="0">
+              <a:solidFill>
+                <a:schemeClr val="accent1">
+                  <a:lumMod val="50000"/>
+                </a:schemeClr>
+              </a:solidFill>
+            </a:endParaRPr>
+          </a:p>
+          <a:p>
+            <a:pPr lvl="1">
+              <a:buFont typeface="Wingdings" panose="05000000000000000000" pitchFamily="2" charset="2"/>
+              <a:buChar char="Ø"/>
+            </a:pPr>
+            <a:r>
+              <a:rPr lang="en-US" sz="2000" dirty="0">
+                <a:solidFill>
+                  <a:schemeClr val="accent1">
+                    <a:lumMod val="50000"/>
+                  </a:schemeClr>
+                </a:solidFill>
+              </a:rPr>
+              <a:t>Enhances robustness across multiple SNR conditions</a:t>
+            </a:r>
+          </a:p>
+          <a:p>
+            <a:pPr marL="457200" lvl="1" indent="0">
+              <a:buNone/>
+            </a:pPr>
+            <a:endParaRPr lang="en-US" sz="2000" dirty="0">
+              <a:solidFill>
+                <a:schemeClr val="accent1">
+                  <a:lumMod val="50000"/>
+                </a:schemeClr>
+              </a:solidFill>
+            </a:endParaRPr>
+          </a:p>
+          <a:p>
+            <a:pPr lvl="1">
+              <a:buFont typeface="Wingdings" panose="05000000000000000000" pitchFamily="2" charset="2"/>
+              <a:buChar char="Ø"/>
+            </a:pPr>
+            <a:r>
+              <a:rPr lang="en-US" sz="2000" dirty="0">
+                <a:solidFill>
+                  <a:schemeClr val="accent1">
+                    <a:lumMod val="50000"/>
+                  </a:schemeClr>
+                </a:solidFill>
+              </a:rPr>
+              <a:t>Preserves multilingual generalization</a:t>
+            </a:r>
+          </a:p>
+          <a:p>
+            <a:pPr marL="457200" lvl="1" indent="0">
+              <a:buNone/>
+            </a:pPr>
+            <a:endParaRPr lang="en-US" sz="2000" dirty="0">
+              <a:solidFill>
+                <a:schemeClr val="accent1">
+                  <a:lumMod val="50000"/>
+                </a:schemeClr>
+              </a:solidFill>
+            </a:endParaRPr>
+          </a:p>
+          <a:p>
+            <a:pPr lvl="1">
+              <a:buFont typeface="Wingdings" panose="05000000000000000000" pitchFamily="2" charset="2"/>
+              <a:buChar char="Ø"/>
+            </a:pPr>
+            <a:r>
+              <a:rPr lang="en-US" sz="2000" dirty="0">
+                <a:solidFill>
+                  <a:schemeClr val="accent1">
+                    <a:lumMod val="50000"/>
+                  </a:schemeClr>
+                </a:solidFill>
+              </a:rPr>
+              <a:t>Operates within limited computational constraints</a:t>
+            </a:r>
+          </a:p>
+          <a:p>
+            <a:pPr marL="0" indent="0">
+              <a:buNone/>
+            </a:pPr>
+            <a:r>
+              <a:rPr lang="en-US" dirty="0">
+                <a:solidFill>
+                  <a:schemeClr val="accent1">
+                    <a:lumMod val="50000"/>
+                  </a:schemeClr>
+                </a:solidFill>
+              </a:rPr>
+              <a:t>  </a:t>
+            </a:r>
+          </a:p>
+          <a:p>
+            <a:r>
+              <a:rPr lang="en-US" dirty="0"/>
+              <a:t>Measurable Research Goals</a:t>
+            </a:r>
+          </a:p>
+          <a:p>
+            <a:pPr lvl="1">
+              <a:buFont typeface="Wingdings" panose="05000000000000000000" pitchFamily="2" charset="2"/>
+              <a:buChar char="ü"/>
+            </a:pPr>
+            <a:r>
+              <a:rPr lang="en-US" sz="2000" dirty="0">
+                <a:solidFill>
+                  <a:schemeClr val="accent1">
+                    <a:lumMod val="50000"/>
+                  </a:schemeClr>
+                </a:solidFill>
+              </a:rPr>
+              <a:t>	Achieve significant WER reduction over baseline Whisper-base.</a:t>
+            </a:r>
+          </a:p>
+          <a:p>
+            <a:pPr marL="457200" lvl="1" indent="0">
+              <a:buNone/>
+            </a:pPr>
+            <a:endParaRPr lang="en-US" sz="2000" dirty="0">
+              <a:solidFill>
+                <a:schemeClr val="accent1">
+                  <a:lumMod val="50000"/>
+                </a:schemeClr>
+              </a:solidFill>
+            </a:endParaRPr>
+          </a:p>
+          <a:p>
+            <a:pPr lvl="1">
+              <a:buFont typeface="Wingdings" panose="05000000000000000000" pitchFamily="2" charset="2"/>
+              <a:buChar char="ü"/>
+            </a:pPr>
+            <a:r>
+              <a:rPr lang="en-US" sz="2000" dirty="0">
+                <a:solidFill>
+                  <a:schemeClr val="accent1">
+                    <a:lumMod val="50000"/>
+                  </a:schemeClr>
+                </a:solidFill>
+              </a:rPr>
+              <a:t>	Quantify performance across SNR levels (5-20dB)</a:t>
+            </a:r>
           </a:p>
         </p:txBody>
       </p:sp>
@@ -2863,11 +3261,103 @@
             <p:ph idx="1"/>
           </p:nvPr>
         </p:nvSpPr>
-        <p:spPr/>
+        <p:spPr>
+          <a:xfrm>
+            <a:off x="166485" y="1105627"/>
+            <a:ext cx="11859027" cy="5295173"/>
+          </a:xfrm>
+        </p:spPr>
         <p:txBody>
           <a:bodyPr/>
           <a:lstStyle/>
           <a:p>
+            <a:r>
+              <a:rPr lang="en-US" dirty="0"/>
+              <a:t>Model</a:t>
+            </a:r>
+          </a:p>
+          <a:p>
+            <a:pPr marL="0" indent="0">
+              <a:buNone/>
+            </a:pPr>
+            <a:endParaRPr lang="en-US" dirty="0"/>
+          </a:p>
+          <a:p>
+            <a:pPr marL="0" indent="0">
+              <a:buNone/>
+            </a:pPr>
+            <a:endParaRPr lang="en-US" dirty="0"/>
+          </a:p>
+          <a:p>
+            <a:pPr marL="0" indent="0">
+              <a:buNone/>
+            </a:pPr>
+            <a:endParaRPr lang="en-US" dirty="0"/>
+          </a:p>
+          <a:p>
+            <a:pPr marL="0" indent="0">
+              <a:buNone/>
+            </a:pPr>
+            <a:endParaRPr lang="en-US" dirty="0"/>
+          </a:p>
+          <a:p>
+            <a:pPr marL="0" indent="0">
+              <a:buNone/>
+            </a:pPr>
+            <a:endParaRPr lang="en-US" dirty="0"/>
+          </a:p>
+          <a:p>
+            <a:r>
+              <a:rPr lang="en-US" dirty="0"/>
+              <a:t>Dataset</a:t>
+            </a:r>
+          </a:p>
+          <a:p>
+            <a:pPr marL="0" indent="0">
+              <a:buNone/>
+            </a:pPr>
+            <a:r>
+              <a:rPr lang="en-US" dirty="0"/>
+              <a:t>	</a:t>
+            </a:r>
+            <a:r>
+              <a:rPr lang="en-US" sz="2000" dirty="0">
+                <a:hlinkClick r:id="rId2"/>
+              </a:rPr>
+              <a:t>https://huggingface.co/datasets/ujs/hinglish</a:t>
+            </a:r>
+            <a:r>
+              <a:rPr lang="en-US" sz="2000" dirty="0"/>
+              <a:t>  - Hugging face wrapper for </a:t>
+            </a:r>
+            <a:r>
+              <a:rPr lang="en-US" sz="2000" dirty="0" err="1"/>
+              <a:t>OpenSLR</a:t>
+            </a:r>
+            <a:r>
+              <a:rPr lang="en-US" sz="2000" dirty="0"/>
+              <a:t> 104 </a:t>
+            </a:r>
+          </a:p>
+          <a:p>
+            <a:pPr marL="0" indent="0">
+              <a:buNone/>
+            </a:pPr>
+            <a:r>
+              <a:rPr lang="en-US" sz="2000" dirty="0"/>
+              <a:t>	dataset by IIT Madras.</a:t>
+            </a:r>
+          </a:p>
+          <a:p>
+            <a:pPr marL="0" indent="0">
+              <a:buNone/>
+            </a:pPr>
+            <a:endParaRPr lang="en-US" dirty="0"/>
+          </a:p>
+          <a:p>
+            <a:pPr marL="0" indent="0">
+              <a:buNone/>
+            </a:pPr>
             <a:endParaRPr lang="en-US" dirty="0"/>
           </a:p>
         </p:txBody>
@@ -2932,6 +3422,36 @@
           </a:p>
         </p:txBody>
       </p:sp>
+      <p:pic>
+        <p:nvPicPr>
+          <p:cNvPr id="14" name="Picture 13">
+            <a:extLst>
+              <a:ext uri="{FF2B5EF4-FFF2-40B4-BE49-F238E27FC236}">
+                <a16:creationId xmlns:a16="http://schemas.microsoft.com/office/drawing/2014/main" id="{B2858452-8024-2A95-20E6-5C535FE4437A}"/>
+              </a:ext>
+            </a:extLst>
+          </p:cNvPr>
+          <p:cNvPicPr>
+            <a:picLocks noChangeAspect="1"/>
+          </p:cNvPicPr>
+          <p:nvPr/>
+        </p:nvPicPr>
+        <p:blipFill>
+          <a:blip r:embed="rId3"/>
+          <a:stretch>
+            <a:fillRect/>
+          </a:stretch>
+        </p:blipFill>
+        <p:spPr>
+          <a:xfrm>
+            <a:off x="2054016" y="1654100"/>
+            <a:ext cx="5751042" cy="2091698"/>
+          </a:xfrm>
+          <a:prstGeom prst="rect">
+            <a:avLst/>
+          </a:prstGeom>
+        </p:spPr>
+      </p:pic>
     </p:spTree>
     <p:extLst>
       <p:ext uri="{BB962C8B-B14F-4D97-AF65-F5344CB8AC3E}">
@@ -2950,7 +3470,13 @@
   <p:cSld>
     <p:spTree>
       <p:nvGrpSpPr>
-        <p:cNvPr id="1" name=""/>
+        <p:cNvPr id="1" name="">
+          <a:extLst>
+            <a:ext uri="{FF2B5EF4-FFF2-40B4-BE49-F238E27FC236}">
+              <a16:creationId xmlns:a16="http://schemas.microsoft.com/office/drawing/2014/main" id="{7D98D82C-948E-462A-A8F1-E81EBF913AA3}"/>
+            </a:ext>
+          </a:extLst>
+        </p:cNvPr>
         <p:cNvGrpSpPr/>
         <p:nvPr/>
       </p:nvGrpSpPr>
@@ -2967,7 +3493,7 @@
           <p:cNvPr id="2" name="Content Placeholder 1">
             <a:extLst>
               <a:ext uri="{FF2B5EF4-FFF2-40B4-BE49-F238E27FC236}">
-                <a16:creationId xmlns:a16="http://schemas.microsoft.com/office/drawing/2014/main" id="{0B1AD815-5C8E-0B54-E14C-AAF03EAA6C7F}"/>
+                <a16:creationId xmlns:a16="http://schemas.microsoft.com/office/drawing/2014/main" id="{8A56A068-A323-3021-8E51-A6E9FF1155E2}"/>
               </a:ext>
             </a:extLst>
           </p:cNvPr>
@@ -2983,6 +3509,183 @@
           <a:bodyPr/>
           <a:lstStyle/>
           <a:p>
+            <a:r>
+              <a:rPr lang="en-US" dirty="0"/>
+              <a:t>Methodology </a:t>
+            </a:r>
+          </a:p>
+          <a:p>
+            <a:pPr marL="0" indent="0">
+              <a:buNone/>
+            </a:pPr>
+            <a:r>
+              <a:rPr lang="en-US" dirty="0"/>
+              <a:t>	Dataset preparation </a:t>
+            </a:r>
+            <a:r>
+              <a:rPr lang="en-US" dirty="0">
+                <a:sym typeface="Wingdings" panose="05000000000000000000" pitchFamily="2" charset="2"/>
+              </a:rPr>
+              <a:t> Fine-tuning  Metrics Comparison</a:t>
+            </a:r>
+            <a:r>
+              <a:rPr lang="en-US" sz="2000" dirty="0">
+                <a:solidFill>
+                  <a:schemeClr val="accent1">
+                    <a:lumMod val="50000"/>
+                  </a:schemeClr>
+                </a:solidFill>
+              </a:rPr>
+              <a:t> </a:t>
+            </a:r>
+          </a:p>
+          <a:p>
+            <a:pPr marL="0" indent="0">
+              <a:buNone/>
+            </a:pPr>
+            <a:r>
+              <a:rPr lang="en-US" dirty="0"/>
+              <a:t>	</a:t>
+            </a:r>
+          </a:p>
+          <a:p>
+            <a:pPr marL="0" indent="0">
+              <a:buNone/>
+            </a:pPr>
+            <a:r>
+              <a:rPr lang="en-US" dirty="0"/>
+              <a:t>	Metrics: WER </a:t>
+            </a:r>
+            <a:r>
+              <a:rPr lang="en-US" sz="2000" dirty="0">
+                <a:solidFill>
+                  <a:schemeClr val="accent1">
+                    <a:lumMod val="50000"/>
+                  </a:schemeClr>
+                </a:solidFill>
+              </a:rPr>
+              <a:t>(Word Error Rate), </a:t>
+            </a:r>
+            <a:r>
+              <a:rPr lang="en-US" dirty="0"/>
+              <a:t>CER </a:t>
+            </a:r>
+            <a:r>
+              <a:rPr lang="en-US" sz="2000" dirty="0">
+                <a:solidFill>
+                  <a:schemeClr val="accent1">
+                    <a:lumMod val="50000"/>
+                  </a:schemeClr>
+                </a:solidFill>
+              </a:rPr>
+              <a:t>(Character Error Rate)</a:t>
+            </a:r>
+          </a:p>
+          <a:p>
+            <a:pPr marL="0" indent="0">
+              <a:buNone/>
+            </a:pPr>
+            <a:endParaRPr lang="en-US" sz="2000" dirty="0">
+              <a:solidFill>
+                <a:schemeClr val="accent1">
+                  <a:lumMod val="50000"/>
+                </a:schemeClr>
+              </a:solidFill>
+            </a:endParaRPr>
+          </a:p>
+          <a:p>
+            <a:r>
+              <a:rPr lang="en-US" dirty="0"/>
+              <a:t>Deep Learning Framework</a:t>
+            </a:r>
+          </a:p>
+          <a:p>
+            <a:pPr marL="0" indent="0">
+              <a:buNone/>
+            </a:pPr>
+            <a:r>
+              <a:rPr lang="en-US" sz="2000" dirty="0">
+                <a:solidFill>
+                  <a:schemeClr val="accent1">
+                    <a:lumMod val="50000"/>
+                  </a:schemeClr>
+                </a:solidFill>
+              </a:rPr>
+              <a:t>	</a:t>
+            </a:r>
+            <a:r>
+              <a:rPr lang="en-US" sz="2000" dirty="0" err="1">
+                <a:solidFill>
+                  <a:schemeClr val="accent1">
+                    <a:lumMod val="50000"/>
+                  </a:schemeClr>
+                </a:solidFill>
+              </a:rPr>
+              <a:t>Pytorch</a:t>
+            </a:r>
+            <a:r>
+              <a:rPr lang="en-US" sz="2000" dirty="0">
+                <a:solidFill>
+                  <a:schemeClr val="accent1">
+                    <a:lumMod val="50000"/>
+                  </a:schemeClr>
+                </a:solidFill>
+              </a:rPr>
+              <a:t> </a:t>
+            </a:r>
+          </a:p>
+          <a:p>
+            <a:pPr marL="0" indent="0">
+              <a:buNone/>
+            </a:pPr>
+            <a:endParaRPr lang="en-US" dirty="0"/>
+          </a:p>
+          <a:p>
+            <a:r>
+              <a:rPr lang="en-US" dirty="0"/>
+              <a:t>Development Environment</a:t>
+            </a:r>
+          </a:p>
+          <a:p>
+            <a:pPr marL="0" indent="0">
+              <a:buNone/>
+            </a:pPr>
+            <a:r>
+              <a:rPr lang="en-US" dirty="0"/>
+              <a:t>	</a:t>
+            </a:r>
+            <a:r>
+              <a:rPr lang="en-US" sz="2000" dirty="0">
+                <a:solidFill>
+                  <a:schemeClr val="accent1">
+                    <a:lumMod val="50000"/>
+                  </a:schemeClr>
+                </a:solidFill>
+              </a:rPr>
+              <a:t>Google </a:t>
+            </a:r>
+            <a:r>
+              <a:rPr lang="en-US" sz="2000" dirty="0" err="1">
+                <a:solidFill>
+                  <a:schemeClr val="accent1">
+                    <a:lumMod val="50000"/>
+                  </a:schemeClr>
+                </a:solidFill>
+              </a:rPr>
+              <a:t>colab</a:t>
+            </a:r>
+            <a:endParaRPr lang="en-US" sz="2000" dirty="0">
+              <a:solidFill>
+                <a:schemeClr val="accent1">
+                  <a:lumMod val="50000"/>
+                </a:schemeClr>
+              </a:solidFill>
+            </a:endParaRPr>
+          </a:p>
+          <a:p>
+            <a:pPr marL="0" indent="0">
+              <a:buNone/>
+            </a:pPr>
             <a:endParaRPr lang="en-US" dirty="0"/>
           </a:p>
         </p:txBody>
@@ -2992,7 +3695,7 @@
           <p:cNvPr id="3" name="Title 2">
             <a:extLst>
               <a:ext uri="{FF2B5EF4-FFF2-40B4-BE49-F238E27FC236}">
-                <a16:creationId xmlns:a16="http://schemas.microsoft.com/office/drawing/2014/main" id="{A18FA631-E5DE-38FB-3631-5247D3FA94E0}"/>
+                <a16:creationId xmlns:a16="http://schemas.microsoft.com/office/drawing/2014/main" id="{94834E64-8B09-D2D6-49D9-870969BACBCC}"/>
               </a:ext>
             </a:extLst>
           </p:cNvPr>
@@ -3012,7 +3715,7 @@
           <a:p>
             <a:r>
               <a:rPr lang="en-US" dirty="0"/>
-              <a:t>Results 1</a:t>
+              <a:t>Methodology, Datasets, and Tools used</a:t>
             </a:r>
           </a:p>
         </p:txBody>
@@ -3022,7 +3725,7 @@
           <p:cNvPr id="4" name="Slide Number Placeholder 3">
             <a:extLst>
               <a:ext uri="{FF2B5EF4-FFF2-40B4-BE49-F238E27FC236}">
-                <a16:creationId xmlns:a16="http://schemas.microsoft.com/office/drawing/2014/main" id="{DEB8CAAE-9044-8FCD-0B55-1811F15639CF}"/>
+                <a16:creationId xmlns:a16="http://schemas.microsoft.com/office/drawing/2014/main" id="{0D4CC1B4-1DC2-4617-482A-F3F0CC01E890}"/>
               </a:ext>
             </a:extLst>
           </p:cNvPr>
@@ -3050,7 +3753,7 @@
     </p:spTree>
     <p:extLst>
       <p:ext uri="{BB962C8B-B14F-4D97-AF65-F5344CB8AC3E}">
-        <p14:creationId xmlns:p14="http://schemas.microsoft.com/office/powerpoint/2010/main" val="4271743234"/>
+        <p14:creationId xmlns:p14="http://schemas.microsoft.com/office/powerpoint/2010/main" val="1029825608"/>
       </p:ext>
     </p:extLst>
   </p:cSld>
@@ -3127,7 +3830,7 @@
           <a:p>
             <a:r>
               <a:rPr lang="en-US" dirty="0"/>
-              <a:t>Results 2</a:t>
+              <a:t>Results 1</a:t>
             </a:r>
           </a:p>
         </p:txBody>
@@ -3165,7 +3868,7 @@
     </p:spTree>
     <p:extLst>
       <p:ext uri="{BB962C8B-B14F-4D97-AF65-F5344CB8AC3E}">
-        <p14:creationId xmlns:p14="http://schemas.microsoft.com/office/powerpoint/2010/main" val="2252760004"/>
+        <p14:creationId xmlns:p14="http://schemas.microsoft.com/office/powerpoint/2010/main" val="4271743234"/>
       </p:ext>
     </p:extLst>
   </p:cSld>
@@ -3242,7 +3945,7 @@
           <a:p>
             <a:r>
               <a:rPr lang="en-US" dirty="0"/>
-              <a:t>Conclusions</a:t>
+              <a:t>Results 2</a:t>
             </a:r>
           </a:p>
         </p:txBody>
@@ -3272,6 +3975,121 @@
               <a:rPr lang="en-GB" smtClean="0"/>
               <a:pPr/>
               <a:t>8</a:t>
+            </a:fld>
+            <a:endParaRPr lang="en-GB" dirty="0"/>
+          </a:p>
+        </p:txBody>
+      </p:sp>
+    </p:spTree>
+    <p:extLst>
+      <p:ext uri="{BB962C8B-B14F-4D97-AF65-F5344CB8AC3E}">
+        <p14:creationId xmlns:p14="http://schemas.microsoft.com/office/powerpoint/2010/main" val="2252760004"/>
+      </p:ext>
+    </p:extLst>
+  </p:cSld>
+  <p:clrMapOvr>
+    <a:masterClrMapping/>
+  </p:clrMapOvr>
+</p:sld>
+</file>
+
+<file path=ppt/slides/slide9.xml><?xml version="1.0" encoding="utf-8"?>
+<p:sld xmlns:a="http://schemas.openxmlformats.org/drawingml/2006/main" xmlns:r="http://schemas.openxmlformats.org/officeDocument/2006/relationships" xmlns:p="http://schemas.openxmlformats.org/presentationml/2006/main">
+  <p:cSld>
+    <p:spTree>
+      <p:nvGrpSpPr>
+        <p:cNvPr id="1" name=""/>
+        <p:cNvGrpSpPr/>
+        <p:nvPr/>
+      </p:nvGrpSpPr>
+      <p:grpSpPr>
+        <a:xfrm>
+          <a:off x="0" y="0"/>
+          <a:ext cx="0" cy="0"/>
+          <a:chOff x="0" y="0"/>
+          <a:chExt cx="0" cy="0"/>
+        </a:xfrm>
+      </p:grpSpPr>
+      <p:sp>
+        <p:nvSpPr>
+          <p:cNvPr id="2" name="Content Placeholder 1">
+            <a:extLst>
+              <a:ext uri="{FF2B5EF4-FFF2-40B4-BE49-F238E27FC236}">
+                <a16:creationId xmlns:a16="http://schemas.microsoft.com/office/drawing/2014/main" id="{0B1AD815-5C8E-0B54-E14C-AAF03EAA6C7F}"/>
+              </a:ext>
+            </a:extLst>
+          </p:cNvPr>
+          <p:cNvSpPr>
+            <a:spLocks noGrp="1"/>
+          </p:cNvSpPr>
+          <p:nvPr>
+            <p:ph idx="1"/>
+          </p:nvPr>
+        </p:nvSpPr>
+        <p:spPr/>
+        <p:txBody>
+          <a:bodyPr/>
+          <a:lstStyle/>
+          <a:p>
+            <a:endParaRPr lang="en-US" dirty="0"/>
+          </a:p>
+        </p:txBody>
+      </p:sp>
+      <p:sp>
+        <p:nvSpPr>
+          <p:cNvPr id="3" name="Title 2">
+            <a:extLst>
+              <a:ext uri="{FF2B5EF4-FFF2-40B4-BE49-F238E27FC236}">
+                <a16:creationId xmlns:a16="http://schemas.microsoft.com/office/drawing/2014/main" id="{A18FA631-E5DE-38FB-3631-5247D3FA94E0}"/>
+              </a:ext>
+            </a:extLst>
+          </p:cNvPr>
+          <p:cNvSpPr>
+            <a:spLocks noGrp="1"/>
+          </p:cNvSpPr>
+          <p:nvPr>
+            <p:ph type="title"/>
+          </p:nvPr>
+        </p:nvSpPr>
+        <p:spPr/>
+        <p:txBody>
+          <a:bodyPr>
+            <a:normAutofit fontScale="90000"/>
+          </a:bodyPr>
+          <a:lstStyle/>
+          <a:p>
+            <a:r>
+              <a:rPr lang="en-US" dirty="0"/>
+              <a:t>Conclusions</a:t>
+            </a:r>
+          </a:p>
+        </p:txBody>
+      </p:sp>
+      <p:sp>
+        <p:nvSpPr>
+          <p:cNvPr id="4" name="Slide Number Placeholder 3">
+            <a:extLst>
+              <a:ext uri="{FF2B5EF4-FFF2-40B4-BE49-F238E27FC236}">
+                <a16:creationId xmlns:a16="http://schemas.microsoft.com/office/drawing/2014/main" id="{DEB8CAAE-9044-8FCD-0B55-1811F15639CF}"/>
+              </a:ext>
+            </a:extLst>
+          </p:cNvPr>
+          <p:cNvSpPr>
+            <a:spLocks noGrp="1"/>
+          </p:cNvSpPr>
+          <p:nvPr>
+            <p:ph type="sldNum" sz="quarter" idx="12"/>
+          </p:nvPr>
+        </p:nvSpPr>
+        <p:spPr/>
+        <p:txBody>
+          <a:bodyPr/>
+          <a:lstStyle/>
+          <a:p>
+            <a:fld id="{742B7CED-DC51-4976-975C-28F89E3EDFC9}" type="slidenum">
+              <a:rPr lang="en-GB" smtClean="0"/>
+              <a:pPr/>
+              <a:t>9</a:t>
             </a:fld>
             <a:endParaRPr lang="en-GB" dirty="0"/>
           </a:p>
